--- a/index.pptx
+++ b/index.pptx
@@ -12931,7 +12931,7 @@
             </a:pPr>
             <a:r>
               <a:rPr/>
-              <a:t>15/04/2026</a:t>
+              <a:t>16/04/2026</a:t>
             </a:r>
           </a:p>
         </p:txBody>

--- a/index.pptx
+++ b/index.pptx
@@ -8259,7 +8259,7 @@
             </a:pPr>
             <a:r>
               <a:rPr/>
-              <a:t>16/07/2026</a:t>
+              <a:t>20/07/2026</a:t>
             </a:r>
           </a:p>
         </p:txBody>

--- a/index.pptx
+++ b/index.pptx
@@ -8259,7 +8259,7 @@
             </a:pPr>
             <a:r>
               <a:rPr/>
-              <a:t>20/07/2026</a:t>
+              <a:t>26/07/2026</a:t>
             </a:r>
           </a:p>
         </p:txBody>

--- a/index.pptx
+++ b/index.pptx
@@ -8259,7 +8259,7 @@
             </a:pPr>
             <a:r>
               <a:rPr/>
-              <a:t>26/07/2026</a:t>
+              <a:t>02/08/2026</a:t>
             </a:r>
           </a:p>
         </p:txBody>

--- a/index.pptx
+++ b/index.pptx
@@ -8259,7 +8259,7 @@
             </a:pPr>
             <a:r>
               <a:rPr/>
-              <a:t>02/08/2026</a:t>
+              <a:t>09/08/2026</a:t>
             </a:r>
           </a:p>
         </p:txBody>

--- a/index.pptx
+++ b/index.pptx
@@ -8259,7 +8259,7 @@
             </a:pPr>
             <a:r>
               <a:rPr/>
-              <a:t>09/08/2026</a:t>
+              <a:t>16/08/2026</a:t>
             </a:r>
           </a:p>
         </p:txBody>

--- a/index.pptx
+++ b/index.pptx
@@ -8259,7 +8259,7 @@
             </a:pPr>
             <a:r>
               <a:rPr/>
-              <a:t>16/08/2026</a:t>
+              <a:t>23/08/2026</a:t>
             </a:r>
           </a:p>
         </p:txBody>

--- a/index.pptx
+++ b/index.pptx
@@ -8259,7 +8259,7 @@
             </a:pPr>
             <a:r>
               <a:rPr/>
-              <a:t>23/08/2026</a:t>
+              <a:t>31/08/2026</a:t>
             </a:r>
           </a:p>
         </p:txBody>

--- a/index.pptx
+++ b/index.pptx
@@ -8259,7 +8259,7 @@
             </a:pPr>
             <a:r>
               <a:rPr/>
-              <a:t>31/08/2026</a:t>
+              <a:t>07/09/2026</a:t>
             </a:r>
           </a:p>
         </p:txBody>
